--- a/M2 Course/СПУПITК/Прак0/Практика 0.pptx
+++ b/M2 Course/СПУПITК/Прак0/Практика 0.pptx
@@ -110,6 +110,11 @@
       </a:defRPr>
     </a:lvl9pPr>
   </p:defaultTextStyle>
+  <p:extLst>
+    <p:ext uri="{EFAFB233-063F-42B5-8137-9DF3F51BA10A}">
+      <p15:sldGuideLst xmlns:p15="http://schemas.microsoft.com/office/powerpoint/2012/main"/>
+    </p:ext>
+  </p:extLst>
 </p:presentation>
 </file>
 
@@ -304,7 +309,7 @@
           <a:p>
             <a:fld id="{BE288D6C-341B-4BC8-A2FB-AC10EADC20CC}" type="datetimeFigureOut">
               <a:rPr lang="ru-RU" smtClean="0"/>
-              <a:t>21.09.2026</a:t>
+              <a:t>22.09.2026</a:t>
             </a:fld>
             <a:endParaRPr lang="ru-RU"/>
           </a:p>
@@ -740,7 +745,7 @@
           <a:p>
             <a:fld id="{BE288D6C-341B-4BC8-A2FB-AC10EADC20CC}" type="datetimeFigureOut">
               <a:rPr lang="ru-RU" smtClean="0"/>
-              <a:t>21.09.2026</a:t>
+              <a:t>22.09.2026</a:t>
             </a:fld>
             <a:endParaRPr lang="ru-RU"/>
           </a:p>
@@ -990,7 +995,7 @@
           <a:p>
             <a:fld id="{BE288D6C-341B-4BC8-A2FB-AC10EADC20CC}" type="datetimeFigureOut">
               <a:rPr lang="ru-RU" smtClean="0"/>
-              <a:t>21.09.2026</a:t>
+              <a:t>22.09.2026</a:t>
             </a:fld>
             <a:endParaRPr lang="ru-RU"/>
           </a:p>
@@ -1298,7 +1303,7 @@
           <a:p>
             <a:fld id="{BE288D6C-341B-4BC8-A2FB-AC10EADC20CC}" type="datetimeFigureOut">
               <a:rPr lang="ru-RU" smtClean="0"/>
-              <a:t>21.09.2026</a:t>
+              <a:t>22.09.2026</a:t>
             </a:fld>
             <a:endParaRPr lang="ru-RU"/>
           </a:p>
@@ -1616,7 +1621,7 @@
           <a:p>
             <a:fld id="{BE288D6C-341B-4BC8-A2FB-AC10EADC20CC}" type="datetimeFigureOut">
               <a:rPr lang="ru-RU" smtClean="0"/>
-              <a:t>21.09.2026</a:t>
+              <a:t>22.09.2026</a:t>
             </a:fld>
             <a:endParaRPr lang="ru-RU"/>
           </a:p>
@@ -1918,7 +1923,7 @@
           <a:p>
             <a:fld id="{BE288D6C-341B-4BC8-A2FB-AC10EADC20CC}" type="datetimeFigureOut">
               <a:rPr lang="ru-RU" smtClean="0"/>
-              <a:t>21.09.2026</a:t>
+              <a:t>22.09.2026</a:t>
             </a:fld>
             <a:endParaRPr lang="ru-RU"/>
           </a:p>
@@ -2285,7 +2290,7 @@
           <a:p>
             <a:fld id="{BE288D6C-341B-4BC8-A2FB-AC10EADC20CC}" type="datetimeFigureOut">
               <a:rPr lang="ru-RU" smtClean="0"/>
-              <a:t>21.09.2026</a:t>
+              <a:t>22.09.2026</a:t>
             </a:fld>
             <a:endParaRPr lang="ru-RU"/>
           </a:p>
@@ -2459,7 +2464,7 @@
           <a:p>
             <a:fld id="{BE288D6C-341B-4BC8-A2FB-AC10EADC20CC}" type="datetimeFigureOut">
               <a:rPr lang="ru-RU" smtClean="0"/>
-              <a:t>21.09.2026</a:t>
+              <a:t>22.09.2026</a:t>
             </a:fld>
             <a:endParaRPr lang="ru-RU"/>
           </a:p>
@@ -2639,7 +2644,7 @@
           <a:p>
             <a:fld id="{BE288D6C-341B-4BC8-A2FB-AC10EADC20CC}" type="datetimeFigureOut">
               <a:rPr lang="ru-RU" smtClean="0"/>
-              <a:t>21.09.2026</a:t>
+              <a:t>22.09.2026</a:t>
             </a:fld>
             <a:endParaRPr lang="ru-RU"/>
           </a:p>
@@ -2809,7 +2814,7 @@
           <a:p>
             <a:fld id="{BE288D6C-341B-4BC8-A2FB-AC10EADC20CC}" type="datetimeFigureOut">
               <a:rPr lang="ru-RU" smtClean="0"/>
-              <a:t>21.09.2026</a:t>
+              <a:t>22.09.2026</a:t>
             </a:fld>
             <a:endParaRPr lang="ru-RU"/>
           </a:p>
@@ -3059,7 +3064,7 @@
           <a:p>
             <a:fld id="{BE288D6C-341B-4BC8-A2FB-AC10EADC20CC}" type="datetimeFigureOut">
               <a:rPr lang="ru-RU" smtClean="0"/>
-              <a:t>21.09.2026</a:t>
+              <a:t>22.09.2026</a:t>
             </a:fld>
             <a:endParaRPr lang="ru-RU"/>
           </a:p>
@@ -3295,7 +3300,7 @@
           <a:p>
             <a:fld id="{BE288D6C-341B-4BC8-A2FB-AC10EADC20CC}" type="datetimeFigureOut">
               <a:rPr lang="ru-RU" smtClean="0"/>
-              <a:t>21.09.2026</a:t>
+              <a:t>22.09.2026</a:t>
             </a:fld>
             <a:endParaRPr lang="ru-RU"/>
           </a:p>
@@ -3677,7 +3682,7 @@
           <a:p>
             <a:fld id="{BE288D6C-341B-4BC8-A2FB-AC10EADC20CC}" type="datetimeFigureOut">
               <a:rPr lang="ru-RU" smtClean="0"/>
-              <a:t>21.09.2026</a:t>
+              <a:t>22.09.2026</a:t>
             </a:fld>
             <a:endParaRPr lang="ru-RU"/>
           </a:p>
@@ -3795,7 +3800,7 @@
           <a:p>
             <a:fld id="{BE288D6C-341B-4BC8-A2FB-AC10EADC20CC}" type="datetimeFigureOut">
               <a:rPr lang="ru-RU" smtClean="0"/>
-              <a:t>21.09.2026</a:t>
+              <a:t>22.09.2026</a:t>
             </a:fld>
             <a:endParaRPr lang="ru-RU"/>
           </a:p>
@@ -3890,7 +3895,7 @@
           <a:p>
             <a:fld id="{BE288D6C-341B-4BC8-A2FB-AC10EADC20CC}" type="datetimeFigureOut">
               <a:rPr lang="ru-RU" smtClean="0"/>
-              <a:t>21.09.2026</a:t>
+              <a:t>22.09.2026</a:t>
             </a:fld>
             <a:endParaRPr lang="ru-RU"/>
           </a:p>
@@ -4145,7 +4150,7 @@
           <a:p>
             <a:fld id="{BE288D6C-341B-4BC8-A2FB-AC10EADC20CC}" type="datetimeFigureOut">
               <a:rPr lang="ru-RU" smtClean="0"/>
-              <a:t>21.09.2026</a:t>
+              <a:t>22.09.2026</a:t>
             </a:fld>
             <a:endParaRPr lang="ru-RU"/>
           </a:p>
@@ -4428,7 +4433,7 @@
           <a:p>
             <a:fld id="{BE288D6C-341B-4BC8-A2FB-AC10EADC20CC}" type="datetimeFigureOut">
               <a:rPr lang="ru-RU" smtClean="0"/>
-              <a:t>21.09.2026</a:t>
+              <a:t>22.09.2026</a:t>
             </a:fld>
             <a:endParaRPr lang="ru-RU"/>
           </a:p>
@@ -4834,7 +4839,7 @@
           <a:p>
             <a:fld id="{BE288D6C-341B-4BC8-A2FB-AC10EADC20CC}" type="datetimeFigureOut">
               <a:rPr lang="ru-RU" smtClean="0"/>
-              <a:t>21.09.2026</a:t>
+              <a:t>22.09.2026</a:t>
             </a:fld>
             <a:endParaRPr lang="ru-RU"/>
           </a:p>
